--- a/dist/초3/영어/듣기와말하기/초3_영어_듣기와말하기_02_이름묻고답하기_학생용.pptx
+++ b/dist/초3/영어/듣기와말하기/초3_영어_듣기와말하기_02_이름묻고답하기_학생용.pptx
@@ -119,20 +119,20 @@
   <p:extLst>
     <p:ext uri="{521415D9-36F7-43E2-AB2F-B90AF26B5E84}">
       <p14:sectionLst xmlns:p14="http://schemas.microsoft.com/office/powerpoint/2010/main">
-        <p14:section name="도입" id="{af09c571-f677-8179-76cd-75d5b4e8189b}">
+        <p14:section name="도입" id="{873fb6fb-23e5-642d-f852-2d7572263f65}">
           <p14:sldIdLst>
             <p14:sldId id="256"/>
             <p14:sldId id="257"/>
           </p14:sldIdLst>
         </p14:section>
-        <p14:section name="개념" id="{1bb1b081-68a7-1504-9620-a957a9cdbfa3}">
+        <p14:section name="개념" id="{5ddd4e74-e735-7885-b026-f23ed854958c}">
           <p14:sldIdLst>
             <p14:sldId id="258"/>
             <p14:sldId id="259"/>
             <p14:sldId id="260"/>
           </p14:sldIdLst>
         </p14:section>
-        <p14:section name="연습" id="{9b9fc4a5-6db1-80c6-51b7-0482c14acdeb}">
+        <p14:section name="연습" id="{7ddd67e7-7922-05d9-0168-f1ab62599fba}">
           <p14:sldIdLst>
             <p14:sldId id="261"/>
             <p14:sldId id="262"/>
@@ -140,18 +140,18 @@
             <p14:sldId id="264"/>
           </p14:sldIdLst>
         </p14:section>
-        <p14:section name="확인" id="{baa2cc5b-e9fb-4a03-42d9-d47217cabb6d}">
+        <p14:section name="확인" id="{f02a0239-d19b-359d-6f9a-dcec8042e3e8}">
           <p14:sldIdLst>
             <p14:sldId id="265"/>
             <p14:sldId id="266"/>
           </p14:sldIdLst>
         </p14:section>
-        <p14:section name="정리" id="{2d0f4170-b94d-d467-736f-74775dd69d26}">
+        <p14:section name="정리" id="{b34705d1-1b91-da37-d39f-086a67069cd7}">
           <p14:sldIdLst>
             <p14:sldId id="267"/>
           </p14:sldIdLst>
         </p14:section>
-        <p14:section name="보충" id="{80d6c6f9-2c0f-4ee3-661d-5000c9e5a968}">
+        <p14:section name="보충" id="{662573b2-f69d-93b4-978e-0e4648d819b7}">
           <p14:sldIdLst>
             <p14:sldId id="268"/>
           </p14:sldIdLst>
@@ -2804,7 +2804,7 @@
               <a:buNone/>
             </a:pPr>
             <a:r>
-              <a:rPr lang="ko-KR" altLang="en-US" sz="3400" b="1" dirty="0">
+              <a:rPr lang="en-US" altLang="ko-KR" sz="3400" b="1" dirty="0">
                 <a:solidFill>
                   <a:srgbClr val="1F2937"/>
                 </a:solidFill>
@@ -2851,7 +2851,7 @@
               <a:buNone/>
             </a:pPr>
             <a:r>
-              <a:rPr lang="ko-KR" altLang="en-US" sz="3400" b="1" dirty="0">
+              <a:rPr lang="en-US" altLang="ko-KR" sz="3400" b="1" dirty="0">
                 <a:solidFill>
                   <a:srgbClr val="1F2937"/>
                 </a:solidFill>
@@ -3622,7 +3622,7 @@
               <a:buNone/>
             </a:pPr>
             <a:r>
-              <a:rPr lang="ko-KR" altLang="en-US" sz="3000" dirty="0">
+              <a:rPr lang="en-US" altLang="ko-KR" sz="3000" dirty="0">
                 <a:solidFill>
                   <a:srgbClr val="1F2937"/>
                 </a:solidFill>
@@ -3738,7 +3738,7 @@
               <a:buNone/>
             </a:pPr>
             <a:r>
-              <a:rPr lang="ko-KR" altLang="en-US" sz="3000" dirty="0">
+              <a:rPr lang="en-US" altLang="ko-KR" sz="3000" dirty="0">
                 <a:solidFill>
                   <a:srgbClr val="1F2937"/>
                 </a:solidFill>
@@ -3854,7 +3854,7 @@
               <a:buNone/>
             </a:pPr>
             <a:r>
-              <a:rPr lang="ko-KR" altLang="en-US" sz="3000" dirty="0">
+              <a:rPr lang="en-US" altLang="ko-KR" sz="3000" dirty="0">
                 <a:solidFill>
                   <a:srgbClr val="1F2937"/>
                 </a:solidFill>
@@ -3970,7 +3970,7 @@
               <a:buNone/>
             </a:pPr>
             <a:r>
-              <a:rPr lang="ko-KR" altLang="en-US" sz="3000" dirty="0">
+              <a:rPr lang="en-US" altLang="ko-KR" sz="3000" dirty="0">
                 <a:solidFill>
                   <a:srgbClr val="1F2937"/>
                 </a:solidFill>
@@ -4692,7 +4692,7 @@
               <a:buNone/>
             </a:pPr>
             <a:r>
-              <a:rPr lang="ko-KR" altLang="en-US" sz="3400" b="1" dirty="0">
+              <a:rPr lang="en-US" altLang="ko-KR" sz="3400" b="1" dirty="0">
                 <a:solidFill>
                   <a:srgbClr val="1F2937"/>
                 </a:solidFill>
@@ -4756,7 +4756,7 @@
               <a:buNone/>
             </a:pPr>
             <a:r>
-              <a:rPr lang="ko-KR" altLang="en-US" sz="3400" b="1" dirty="0">
+              <a:rPr lang="en-US" altLang="ko-KR" sz="3400" b="1" dirty="0">
                 <a:solidFill>
                   <a:srgbClr val="1F2937"/>
                 </a:solidFill>
@@ -4820,7 +4820,7 @@
               <a:buNone/>
             </a:pPr>
             <a:r>
-              <a:rPr lang="ko-KR" altLang="en-US" sz="3400" b="1" dirty="0">
+              <a:rPr lang="en-US" altLang="ko-KR" sz="3400" b="1" dirty="0">
                 <a:solidFill>
                   <a:srgbClr val="1F2937"/>
                 </a:solidFill>
@@ -4884,7 +4884,7 @@
               <a:buNone/>
             </a:pPr>
             <a:r>
-              <a:rPr lang="ko-KR" altLang="en-US" sz="3400" b="1" dirty="0">
+              <a:rPr lang="en-US" altLang="ko-KR" sz="3400" b="1" dirty="0">
                 <a:solidFill>
                   <a:srgbClr val="1F2937"/>
                 </a:solidFill>
@@ -5456,7 +5456,7 @@
               <a:buNone/>
             </a:pPr>
             <a:r>
-              <a:rPr lang="ko-KR" altLang="en-US" sz="3400" b="1" dirty="0">
+              <a:rPr lang="en-US" altLang="ko-KR" sz="3400" b="1" dirty="0">
                 <a:solidFill>
                   <a:srgbClr val="1F2937"/>
                 </a:solidFill>
@@ -5703,7 +5703,7 @@
               <a:buNone/>
             </a:pPr>
             <a:r>
-              <a:rPr lang="ko-KR" altLang="en-US" sz="3400" b="1" dirty="0">
+              <a:rPr lang="en-US" altLang="ko-KR" sz="3400" b="1" dirty="0">
                 <a:solidFill>
                   <a:srgbClr val="1F2937"/>
                 </a:solidFill>
@@ -5767,7 +5767,7 @@
               <a:buNone/>
             </a:pPr>
             <a:r>
-              <a:rPr lang="ko-KR" altLang="en-US" sz="3400" b="1" dirty="0">
+              <a:rPr lang="en-US" altLang="ko-KR" sz="3400" b="1" dirty="0">
                 <a:solidFill>
                   <a:srgbClr val="1F2937"/>
                 </a:solidFill>
@@ -6014,7 +6014,7 @@
               <a:buNone/>
             </a:pPr>
             <a:r>
-              <a:rPr lang="ko-KR" altLang="en-US" sz="3400" b="1" dirty="0">
+              <a:rPr lang="en-US" altLang="ko-KR" sz="3400" b="1" dirty="0">
                 <a:solidFill>
                   <a:srgbClr val="1F2937"/>
                 </a:solidFill>
@@ -6078,7 +6078,7 @@
               <a:buNone/>
             </a:pPr>
             <a:r>
-              <a:rPr lang="ko-KR" altLang="en-US" sz="3400" b="1" dirty="0">
+              <a:rPr lang="en-US" altLang="ko-KR" sz="3400" b="1" dirty="0">
                 <a:solidFill>
                   <a:srgbClr val="1F2937"/>
                 </a:solidFill>
@@ -6320,7 +6320,7 @@
               <a:buNone/>
             </a:pPr>
             <a:r>
-              <a:rPr lang="ko-KR" altLang="en-US" sz="3000" dirty="0">
+              <a:rPr lang="en-US" altLang="ko-KR" sz="3000" dirty="0">
                 <a:solidFill>
                   <a:srgbClr val="1F2937"/>
                 </a:solidFill>
@@ -6343,7 +6343,7 @@
               <a:buNone/>
             </a:pPr>
             <a:r>
-              <a:rPr lang="ko-KR" altLang="en-US" sz="3000" dirty="0">
+              <a:rPr lang="en-US" altLang="ko-KR" sz="3000" dirty="0">
                 <a:solidFill>
                   <a:srgbClr val="1F2937"/>
                 </a:solidFill>
@@ -6366,7 +6366,7 @@
               <a:buNone/>
             </a:pPr>
             <a:r>
-              <a:rPr lang="ko-KR" altLang="en-US" sz="3000" dirty="0">
+              <a:rPr lang="en-US" altLang="ko-KR" sz="3000" dirty="0">
                 <a:solidFill>
                   <a:srgbClr val="1F2937"/>
                 </a:solidFill>
@@ -6389,7 +6389,7 @@
               <a:buNone/>
             </a:pPr>
             <a:r>
-              <a:rPr lang="ko-KR" altLang="en-US" sz="3000" dirty="0">
+              <a:rPr lang="en-US" altLang="ko-KR" sz="3000" dirty="0">
                 <a:solidFill>
                   <a:srgbClr val="1F2937"/>
                 </a:solidFill>
@@ -6412,7 +6412,7 @@
               <a:buNone/>
             </a:pPr>
             <a:r>
-              <a:rPr lang="ko-KR" altLang="en-US" sz="3000" dirty="0">
+              <a:rPr lang="en-US" altLang="ko-KR" sz="3000" dirty="0">
                 <a:solidFill>
                   <a:srgbClr val="1F2937"/>
                 </a:solidFill>
@@ -6651,7 +6651,7 @@
               <a:buNone/>
             </a:pPr>
             <a:r>
-              <a:rPr lang="ko-KR" altLang="en-US" sz="3000" dirty="0">
+              <a:rPr lang="en-US" altLang="ko-KR" sz="3000" dirty="0">
                 <a:solidFill>
                   <a:srgbClr val="1F2937"/>
                 </a:solidFill>
@@ -6737,7 +6737,7 @@
               <a:buNone/>
             </a:pPr>
             <a:r>
-              <a:rPr lang="ko-KR" altLang="en-US" sz="3000" dirty="0">
+              <a:rPr lang="en-US" altLang="ko-KR" sz="3000" dirty="0">
                 <a:solidFill>
                   <a:srgbClr val="1F2937"/>
                 </a:solidFill>
@@ -6823,7 +6823,7 @@
               <a:buNone/>
             </a:pPr>
             <a:r>
-              <a:rPr lang="ko-KR" altLang="en-US" sz="3000" dirty="0">
+              <a:rPr lang="en-US" altLang="ko-KR" sz="3000" dirty="0">
                 <a:solidFill>
                   <a:srgbClr val="1F2937"/>
                 </a:solidFill>
@@ -7169,7 +7169,7 @@
               <a:buNone/>
             </a:pPr>
             <a:r>
-              <a:rPr lang="ko-KR" altLang="en-US" sz="3400" b="1" dirty="0">
+              <a:rPr lang="en-US" altLang="ko-KR" sz="3400" b="1" dirty="0">
                 <a:solidFill>
                   <a:srgbClr val="1F2937"/>
                 </a:solidFill>
@@ -7263,7 +7263,7 @@
               <a:buNone/>
             </a:pPr>
             <a:r>
-              <a:rPr lang="ko-KR" altLang="en-US" sz="3400" b="1" dirty="0">
+              <a:rPr lang="en-US" altLang="ko-KR" sz="3400" b="1" dirty="0">
                 <a:solidFill>
                   <a:srgbClr val="1F2937"/>
                 </a:solidFill>
@@ -7571,7 +7571,7 @@
               <a:buNone/>
             </a:pPr>
             <a:r>
-              <a:rPr lang="ko-KR" altLang="en-US" sz="3000" dirty="0">
+              <a:rPr lang="en-US" altLang="ko-KR" sz="3000" dirty="0">
                 <a:solidFill>
                   <a:srgbClr val="1F2937"/>
                 </a:solidFill>
@@ -7588,7 +7588,7 @@
               <a:buNone/>
             </a:pPr>
             <a:r>
-              <a:rPr lang="ko-KR" altLang="en-US" sz="3000" dirty="0">
+              <a:rPr lang="en-US" altLang="ko-KR" sz="3000" dirty="0">
                 <a:solidFill>
                   <a:srgbClr val="1F2937"/>
                 </a:solidFill>
@@ -7674,7 +7674,7 @@
               <a:buNone/>
             </a:pPr>
             <a:r>
-              <a:rPr lang="ko-KR" altLang="en-US" sz="3000" dirty="0">
+              <a:rPr lang="en-US" altLang="ko-KR" sz="3000" dirty="0">
                 <a:solidFill>
                   <a:srgbClr val="1F2937"/>
                 </a:solidFill>
@@ -7691,7 +7691,7 @@
               <a:buNone/>
             </a:pPr>
             <a:r>
-              <a:rPr lang="ko-KR" altLang="en-US" sz="3000" dirty="0">
+              <a:rPr lang="en-US" altLang="ko-KR" sz="3000" dirty="0">
                 <a:solidFill>
                   <a:srgbClr val="1F2937"/>
                 </a:solidFill>
@@ -7777,7 +7777,7 @@
               <a:buNone/>
             </a:pPr>
             <a:r>
-              <a:rPr lang="ko-KR" altLang="en-US" sz="3000" dirty="0">
+              <a:rPr lang="en-US" altLang="ko-KR" sz="3000" dirty="0">
                 <a:solidFill>
                   <a:srgbClr val="1F2937"/>
                 </a:solidFill>
@@ -7794,7 +7794,7 @@
               <a:buNone/>
             </a:pPr>
             <a:r>
-              <a:rPr lang="ko-KR" altLang="en-US" sz="3000" dirty="0">
+              <a:rPr lang="en-US" altLang="ko-KR" sz="3000" dirty="0">
                 <a:solidFill>
                   <a:srgbClr val="1F2937"/>
                 </a:solidFill>

--- a/dist/초3/영어/듣기와말하기/초3_영어_듣기와말하기_02_이름묻고답하기_학생용.pptx
+++ b/dist/초3/영어/듣기와말하기/초3_영어_듣기와말하기_02_이름묻고답하기_학생용.pptx
@@ -119,20 +119,20 @@
   <p:extLst>
     <p:ext uri="{521415D9-36F7-43E2-AB2F-B90AF26B5E84}">
       <p14:sectionLst xmlns:p14="http://schemas.microsoft.com/office/powerpoint/2010/main">
-        <p14:section name="도입" id="{873fb6fb-23e5-642d-f852-2d7572263f65}">
+        <p14:section name="도입" id="{9f727c71-b869-6239-e009-e33f35317f00}">
           <p14:sldIdLst>
             <p14:sldId id="256"/>
             <p14:sldId id="257"/>
           </p14:sldIdLst>
         </p14:section>
-        <p14:section name="개념" id="{5ddd4e74-e735-7885-b026-f23ed854958c}">
+        <p14:section name="개념" id="{ebc45977-b2e2-8808-82fe-c49f3bfbe2ea}">
           <p14:sldIdLst>
             <p14:sldId id="258"/>
             <p14:sldId id="259"/>
             <p14:sldId id="260"/>
           </p14:sldIdLst>
         </p14:section>
-        <p14:section name="연습" id="{7ddd67e7-7922-05d9-0168-f1ab62599fba}">
+        <p14:section name="연습" id="{e6e8e4f6-176e-a553-6374-568113040cd8}">
           <p14:sldIdLst>
             <p14:sldId id="261"/>
             <p14:sldId id="262"/>
@@ -140,18 +140,18 @@
             <p14:sldId id="264"/>
           </p14:sldIdLst>
         </p14:section>
-        <p14:section name="확인" id="{f02a0239-d19b-359d-6f9a-dcec8042e3e8}">
+        <p14:section name="확인" id="{92575d82-4548-50c1-3852-4bcf2f9b81f2}">
           <p14:sldIdLst>
             <p14:sldId id="265"/>
             <p14:sldId id="266"/>
           </p14:sldIdLst>
         </p14:section>
-        <p14:section name="정리" id="{b34705d1-1b91-da37-d39f-086a67069cd7}">
+        <p14:section name="정리" id="{9b999a12-3756-d22a-a285-afee91721420}">
           <p14:sldIdLst>
             <p14:sldId id="267"/>
           </p14:sldIdLst>
         </p14:section>
-        <p14:section name="보충" id="{662573b2-f69d-93b4-978e-0e4648d819b7}">
+        <p14:section name="보충" id="{0f3985df-2706-a7af-dd0b-2ec8524656f2}">
           <p14:sldIdLst>
             <p14:sldId id="268"/>
           </p14:sldIdLst>

--- a/dist/초3/영어/듣기와말하기/초3_영어_듣기와말하기_02_이름묻고답하기_학생용.pptx
+++ b/dist/초3/영어/듣기와말하기/초3_영어_듣기와말하기_02_이름묻고답하기_학생용.pptx
@@ -119,20 +119,20 @@
   <p:extLst>
     <p:ext uri="{521415D9-36F7-43E2-AB2F-B90AF26B5E84}">
       <p14:sectionLst xmlns:p14="http://schemas.microsoft.com/office/powerpoint/2010/main">
-        <p14:section name="도입" id="{9f727c71-b869-6239-e009-e33f35317f00}">
+        <p14:section name="도입" id="{8de4330a-911e-4bbd-9dfd-8edb007bd022}">
           <p14:sldIdLst>
             <p14:sldId id="256"/>
             <p14:sldId id="257"/>
           </p14:sldIdLst>
         </p14:section>
-        <p14:section name="개념" id="{ebc45977-b2e2-8808-82fe-c49f3bfbe2ea}">
+        <p14:section name="개념" id="{1e73cd06-e1f8-a792-5c61-c1aeee09bb02}">
           <p14:sldIdLst>
             <p14:sldId id="258"/>
             <p14:sldId id="259"/>
             <p14:sldId id="260"/>
           </p14:sldIdLst>
         </p14:section>
-        <p14:section name="연습" id="{e6e8e4f6-176e-a553-6374-568113040cd8}">
+        <p14:section name="연습" id="{d9ca740b-b248-849b-ed33-74ccd18123c6}">
           <p14:sldIdLst>
             <p14:sldId id="261"/>
             <p14:sldId id="262"/>
@@ -140,18 +140,18 @@
             <p14:sldId id="264"/>
           </p14:sldIdLst>
         </p14:section>
-        <p14:section name="확인" id="{92575d82-4548-50c1-3852-4bcf2f9b81f2}">
+        <p14:section name="확인" id="{7e31aaa1-2375-a34a-57fc-3c2860c57369}">
           <p14:sldIdLst>
             <p14:sldId id="265"/>
             <p14:sldId id="266"/>
           </p14:sldIdLst>
         </p14:section>
-        <p14:section name="정리" id="{9b999a12-3756-d22a-a285-afee91721420}">
+        <p14:section name="정리" id="{6616a74a-b613-fef2-81cd-975c4117bb9c}">
           <p14:sldIdLst>
             <p14:sldId id="267"/>
           </p14:sldIdLst>
         </p14:section>
-        <p14:section name="보충" id="{0f3985df-2706-a7af-dd0b-2ec8524656f2}">
+        <p14:section name="보충" id="{3523d70c-7084-f96d-e463-b589f9bb32ba}">
           <p14:sldIdLst>
             <p14:sldId id="268"/>
           </p14:sldIdLst>
